--- a/courses/learn_placement/module02-05-analytical-place/slides.pptx
+++ b/courses/learn_placement/module02-05-analytical-place/slides.pptx
@@ -16,6 +16,9 @@
     <p:sldId id="264" r:id="rId16"/>
     <p:sldId id="265" r:id="rId17"/>
     <p:sldId id="266" r:id="rId18"/>
+    <p:sldId id="267" r:id="rId19"/>
+    <p:sldId id="268" r:id="rId20"/>
+    <p:sldId id="269" r:id="rId21"/>
   </p:sldIdLst>
   <p:sldSz cx="12191695" cy="6858000" type="screen4x3"/>
   <p:notesSz cx="6858000" cy="9144000"/>
@@ -582,7 +585,7 @@
           <a:lstStyle/>
           <a:p>
             <a:r>
-              <a:t>Common traps: celebrating HPWL while cells pile into one bin; ignoring fixed pads A and D; mixing bbox and clique models in one report; keeping only the final SA iterate instead of the best; and forgetting that timing weights change the objective, not just the label.</a:t>
+              <a:t>In the browser lab track, open the **analytical-place** lab from the tools shelf. Load the starter placement, run the algorithm once, and read HPWL—and density when the panel shows it. Work the challenges that lock the goldens, then come back to implement the same loop yourself.</a:t>
             </a:r>
           </a:p>
         </p:txBody>
@@ -652,6 +655,146 @@
           <a:lstStyle/>
           <a:p>
             <a:r>
+              <a:t>In the implement track, open this module's EXAMPLES.md Pseudocode section and the course common solvers. Parse `tiny_place.json`, run the algorithm with a deterministic seed, and print coordinates plus HPWL. Match the browser goldens before you claim the checklist.</a:t>
+            </a:r>
+          </a:p>
+        </p:txBody>
+      </p:sp>
+      <p:sp>
+        <p:nvSpPr>
+          <p:cNvPr id="4" name="Slide Number Placeholder 3"/>
+          <p:cNvSpPr>
+            <a:spLocks noGrp="1"/>
+          </p:cNvSpPr>
+          <p:nvPr>
+            <p:ph type="sldNum" idx="5" sz="quarter"/>
+          </p:nvPr>
+        </p:nvSpPr>
+        <p:spPr/>
+      </p:sp>
+    </p:spTree>
+  </p:cSld>
+  <p:clrMapOvr>
+    <a:masterClrMapping/>
+  </p:clrMapOvr>
+</p:notes>
+</file>
+
+<file path=ppt/notesSlides/notesSlide12.xml><?xml version="1.0" encoding="utf-8"?>
+<p:notes xmlns:a="http://schemas.openxmlformats.org/drawingml/2006/main" xmlns:p="http://schemas.openxmlformats.org/presentationml/2006/main" xmlns:r="http://schemas.openxmlformats.org/officeDocument/2006/relationships">
+  <p:cSld>
+    <p:spTree>
+      <p:nvGrpSpPr>
+        <p:cNvPr id="1" name=""/>
+        <p:cNvGrpSpPr/>
+        <p:nvPr/>
+      </p:nvGrpSpPr>
+      <p:grpSpPr>
+        <a:xfrm>
+          <a:off x="0" y="0"/>
+          <a:ext cx="0" cy="0"/>
+          <a:chOff x="0" y="0"/>
+          <a:chExt cx="0" cy="0"/>
+        </a:xfrm>
+      </p:grpSpPr>
+      <p:sp>
+        <p:nvSpPr>
+          <p:cNvPr id="2" name="Slide Image Placeholder 1"/>
+          <p:cNvSpPr>
+            <a:spLocks noGrp="1"/>
+          </p:cNvSpPr>
+          <p:nvPr>
+            <p:ph type="sldImg" idx="2"/>
+          </p:nvPr>
+        </p:nvSpPr>
+        <p:spPr/>
+      </p:sp>
+      <p:sp>
+        <p:nvSpPr>
+          <p:cNvPr id="3" name="Notes Placeholder 2"/>
+          <p:cNvSpPr>
+            <a:spLocks noGrp="1"/>
+          </p:cNvSpPr>
+          <p:nvPr>
+            <p:ph type="body" idx="3" sz="quarter"/>
+          </p:nvPr>
+        </p:nvSpPr>
+        <p:spPr/>
+        <p:txBody>
+          <a:bodyPr/>
+          <a:lstStyle/>
+          <a:p>
+            <a:r>
+              <a:t>Common traps: celebrating HPWL while cells pile into one bin; ignoring fixed pads A and D; mixing bbox and clique models in one report; keeping only the final SA iterate instead of the best; and forgetting that timing weights change the objective, not just the label.</a:t>
+            </a:r>
+          </a:p>
+        </p:txBody>
+      </p:sp>
+      <p:sp>
+        <p:nvSpPr>
+          <p:cNvPr id="4" name="Slide Number Placeholder 3"/>
+          <p:cNvSpPr>
+            <a:spLocks noGrp="1"/>
+          </p:cNvSpPr>
+          <p:nvPr>
+            <p:ph type="sldNum" idx="5" sz="quarter"/>
+          </p:nvPr>
+        </p:nvSpPr>
+        <p:spPr/>
+      </p:sp>
+    </p:spTree>
+  </p:cSld>
+  <p:clrMapOvr>
+    <a:masterClrMapping/>
+  </p:clrMapOvr>
+</p:notes>
+</file>
+
+<file path=ppt/notesSlides/notesSlide13.xml><?xml version="1.0" encoding="utf-8"?>
+<p:notes xmlns:a="http://schemas.openxmlformats.org/drawingml/2006/main" xmlns:p="http://schemas.openxmlformats.org/presentationml/2006/main" xmlns:r="http://schemas.openxmlformats.org/officeDocument/2006/relationships">
+  <p:cSld>
+    <p:spTree>
+      <p:nvGrpSpPr>
+        <p:cNvPr id="1" name=""/>
+        <p:cNvGrpSpPr/>
+        <p:nvPr/>
+      </p:nvGrpSpPr>
+      <p:grpSpPr>
+        <a:xfrm>
+          <a:off x="0" y="0"/>
+          <a:ext cx="0" cy="0"/>
+          <a:chOff x="0" y="0"/>
+          <a:chExt cx="0" cy="0"/>
+        </a:xfrm>
+      </p:grpSpPr>
+      <p:sp>
+        <p:nvSpPr>
+          <p:cNvPr id="2" name="Slide Image Placeholder 1"/>
+          <p:cNvSpPr>
+            <a:spLocks noGrp="1"/>
+          </p:cNvSpPr>
+          <p:nvPr>
+            <p:ph type="sldImg" idx="2"/>
+          </p:nvPr>
+        </p:nvSpPr>
+        <p:spPr/>
+      </p:sp>
+      <p:sp>
+        <p:nvSpPr>
+          <p:cNvPr id="3" name="Notes Placeholder 2"/>
+          <p:cNvSpPr>
+            <a:spLocks noGrp="1"/>
+          </p:cNvSpPr>
+          <p:nvPr>
+            <p:ph type="body" idx="3" sz="quarter"/>
+          </p:nvPr>
+        </p:nvSpPr>
+        <p:spPr/>
+        <p:txBody>
+          <a:bodyPr/>
+          <a:lstStyle/>
+          <a:p>
+            <a:r>
               <a:t>Complete the checklist for at least one track—preferably both. Implement until your metrics match the starter goldens. When you’re ready, take the short quiz, then continue to the next module.</a:t>
             </a:r>
           </a:p>
@@ -725,12 +868,6 @@
               <a:t>Wirelength stage clusters; density stage pushes cells out of overloaded bins; a light reconnect keeps HPWL from exploding. Watch both HPWL and overflow—winning wirelength while overflowing every bin is not analytical success.</a:t>
             </a:r>
           </a:p>
-          <a:p/>
-          <a:p>
-            <a:r>
-              <a:t>&lt;!-- algorithm-walkthrough --&gt;</a:t>
-            </a:r>
-          </a:p>
         </p:txBody>
       </p:sp>
       <p:sp>
@@ -798,7 +935,13 @@
           <a:lstStyle/>
           <a:p>
             <a:r>
-              <a:t>Analytical lite starts like force/quadratic: pull for wirelength with pads A and D fixed. Clustering cuts HPWL but can overload bins.</a:t>
+              <a:t>Analytical lite is three stages in pseudocode: wirelength clustering, density repulsion from overloaded bins, then a light reconnect so HPWL does not explode.</a:t>
+            </a:r>
+          </a:p>
+          <a:p/>
+          <a:p>
+            <a:r>
+              <a:t>Open this module's examples file and find the Pseudocode section. That written sketch is what you implement on the implement track and what the browser challenges measure.</a:t>
             </a:r>
           </a:p>
         </p:txBody>
@@ -868,7 +1011,7 @@
           <a:lstStyle/>
           <a:p>
             <a:r>
-              <a:t>A density-repulsion stage pushes cells out of crowded two-by-two bins, then a light reconnect keeps HPWL from exploding.</a:t>
+              <a:t>Default teaching run lands near forty-eight point one HPWL. Winning wirelength while overflowing every bin is not success—report both metrics.</a:t>
             </a:r>
           </a:p>
         </p:txBody>
@@ -938,7 +1081,7 @@
           <a:lstStyle/>
           <a:p>
             <a:r>
-              <a:t>The combined solve lands near forty-eight point one—close to quadratic, deliberately above free force, because spreading fights pure collapse.</a:t>
+              <a:t>Analytical lite starts like force/quadratic: pull for wirelength with pads A and D fixed. Clustering cuts HPWL but can overload bins.</a:t>
             </a:r>
           </a:p>
         </p:txBody>
@@ -1008,7 +1151,7 @@
           <a:lstStyle/>
           <a:p>
             <a:r>
-              <a:t>Winning wirelength while overflowing every bin is not analytical success. Quote both metrics after the density stage.</a:t>
+              <a:t>A density-repulsion stage pushes cells out of crowded two-by-two bins, then a light reconnect keeps HPWL from exploding.</a:t>
             </a:r>
           </a:p>
         </p:txBody>
@@ -1078,13 +1221,7 @@
           <a:lstStyle/>
           <a:p>
             <a:r>
-              <a:t>Analytical lite is a two-act play: cluster for wirelength, spread for density. Lock pads and iteration knobs so forty-eight point one stays reproducible.</a:t>
-            </a:r>
-          </a:p>
-          <a:p/>
-          <a:p>
-            <a:r>
-              <a:t>&lt;!-- /algorithm-walkthrough --&gt;</a:t>
+              <a:t>The combined solve lands near forty-eight point one—close to quadratic, deliberately above free force, because spreading fights pure collapse.</a:t>
             </a:r>
           </a:p>
         </p:txBody>
@@ -1154,7 +1291,7 @@
           <a:lstStyle/>
           <a:p>
             <a:r>
-              <a:t>In the browser lab track, open the **analytical-place** lab from the tools shelf. Load the starter placement, run the algorithm once, and read HPWL—and density when the panel shows it. Work the challenges that lock the goldens, then come back to implement the same loop yourself.</a:t>
+              <a:t>Winning wirelength while overflowing every bin is not analytical success. Quote both metrics after the density stage.</a:t>
             </a:r>
           </a:p>
         </p:txBody>
@@ -1224,7 +1361,7 @@
           <a:lstStyle/>
           <a:p>
             <a:r>
-              <a:t>In the implement track, open this module’s examples and the course `common/` solvers. Parse `tiny_place.json`, run the algorithm with a deterministic seed, and print coordinates plus HPWL. Match the browser goldens before you claim the checklist.</a:t>
+              <a:t>Analytical lite is a two-act play: cluster for wirelength, spread for density. Lock pads and iteration knobs so forty-eight point one stays reproducible.</a:t>
             </a:r>
           </a:p>
         </p:txBody>
@@ -4382,21 +4519,45 @@
                 </a:solidFill>
                 <a:latin typeface="Calibri"/>
               </a:rPr>
-              <a:t>Pitfalls</a:t>
-            </a:r>
-          </a:p>
-        </p:txBody>
-      </p:sp>
-      <p:sp>
-        <p:nvSpPr>
-          <p:cNvPr id="3" name="TextBox 2"/>
+              <a:t>Wirelength then density</a:t>
+            </a:r>
+          </a:p>
+        </p:txBody>
+      </p:sp>
+      <p:pic>
+        <p:nvPicPr>
+          <p:cNvPr id="3" name="Picture 2" descr="05-takeaway.png"/>
+          <p:cNvPicPr>
+            <a:picLocks noChangeAspect="1"/>
+          </p:cNvPicPr>
+          <p:nvPr/>
+        </p:nvPicPr>
+        <p:blipFill>
+          <a:blip r:embed="rId2"/>
+          <a:stretch>
+            <a:fillRect/>
+          </a:stretch>
+        </p:blipFill>
+        <p:spPr>
+          <a:xfrm>
+            <a:off x="548640" y="1143000"/>
+            <a:ext cx="9404113" cy="4572000"/>
+          </a:xfrm>
+          <a:prstGeom prst="rect">
+            <a:avLst/>
+          </a:prstGeom>
+        </p:spPr>
+      </p:pic>
+      <p:sp>
+        <p:nvSpPr>
+          <p:cNvPr id="4" name="TextBox 3"/>
           <p:cNvSpPr txBox="1"/>
           <p:nvPr/>
         </p:nvSpPr>
         <p:spPr>
           <a:xfrm>
-            <a:off x="548640" y="1234440"/>
-            <a:ext cx="11064240" cy="4937760"/>
+            <a:off x="548640" y="5897880"/>
+            <a:ext cx="11064240" cy="411480"/>
           </a:xfrm>
           <a:prstGeom prst="rect">
             <a:avLst/>
@@ -4409,32 +4570,26 @@
           </a:bodyPr>
           <a:lstStyle/>
           <a:p>
-            <a:pPr lvl="0" marL="457200" indent="-228600">
-              <a:buFont typeface="Calibri"/>
-              <a:spcAft>
-                <a:spcPts val="1000"/>
-              </a:spcAft>
-              <a:buSzPct val="100000"/>
-              <a:buChar char="•"/>
+            <a:pPr>
               <a:lnSpc>
                 <a:spcPts val="2200"/>
               </a:lnSpc>
             </a:pPr>
             <a:r>
-              <a:rPr sz="2000" b="0">
+              <a:rPr sz="1200" b="0">
                 <a:solidFill>
                   <a:srgbClr val="333333"/>
                 </a:solidFill>
                 <a:latin typeface="Calibri"/>
               </a:rPr>
-              <a:t>Common traps</a:t>
-            </a:r>
-          </a:p>
-        </p:txBody>
-      </p:sp>
-      <p:sp>
-        <p:nvSpPr>
-          <p:cNvPr id="4" name="TextBox 3"/>
+              <a:t>Wirelength then density</a:t>
+            </a:r>
+          </a:p>
+        </p:txBody>
+      </p:sp>
+      <p:sp>
+        <p:nvSpPr>
+          <p:cNvPr id="5" name="TextBox 4"/>
           <p:cNvSpPr txBox="1"/>
           <p:nvPr/>
         </p:nvSpPr>
@@ -4523,6 +4678,535 @@
                 </a:solidFill>
                 <a:latin typeface="Calibri"/>
               </a:rPr>
+              <a:t>Browser lab track</a:t>
+            </a:r>
+          </a:p>
+        </p:txBody>
+      </p:sp>
+      <p:sp>
+        <p:nvSpPr>
+          <p:cNvPr id="3" name="TextBox 2"/>
+          <p:cNvSpPr txBox="1"/>
+          <p:nvPr/>
+        </p:nvSpPr>
+        <p:spPr>
+          <a:xfrm>
+            <a:off x="548640" y="1234440"/>
+            <a:ext cx="11064240" cy="4937760"/>
+          </a:xfrm>
+          <a:prstGeom prst="rect">
+            <a:avLst/>
+          </a:prstGeom>
+          <a:noFill/>
+        </p:spPr>
+        <p:txBody>
+          <a:bodyPr wrap="square">
+            <a:noAutofit/>
+          </a:bodyPr>
+          <a:lstStyle/>
+          <a:p>
+            <a:pPr lvl="0" marL="457200" indent="-228600">
+              <a:buFont typeface="Calibri"/>
+              <a:spcAft>
+                <a:spcPts val="1000"/>
+              </a:spcAft>
+              <a:buSzPct val="100000"/>
+              <a:buChar char="•"/>
+              <a:lnSpc>
+                <a:spcPts val="2200"/>
+              </a:lnSpc>
+            </a:pPr>
+            <a:r>
+              <a:rPr sz="2000" b="0">
+                <a:solidFill>
+                  <a:srgbClr val="333333"/>
+                </a:solidFill>
+                <a:latin typeface="Calibri"/>
+              </a:rPr>
+              <a:t>In the browser lab track, open the </a:t>
+            </a:r>
+            <a:r>
+              <a:rPr sz="2000" b="1">
+                <a:solidFill>
+                  <a:srgbClr val="333333"/>
+                </a:solidFill>
+                <a:latin typeface="Calibri"/>
+              </a:rPr>
+              <a:t>analytical-place</a:t>
+            </a:r>
+            <a:r>
+              <a:rPr sz="2000" b="0">
+                <a:solidFill>
+                  <a:srgbClr val="333333"/>
+                </a:solidFill>
+                <a:latin typeface="Calibri"/>
+              </a:rPr>
+              <a:t> lab from the tools shelf</a:t>
+            </a:r>
+          </a:p>
+          <a:p>
+            <a:pPr lvl="0" marL="457200" indent="-228600">
+              <a:buFont typeface="Calibri"/>
+              <a:spcAft>
+                <a:spcPts val="1000"/>
+              </a:spcAft>
+              <a:buSzPct val="100000"/>
+              <a:buChar char="•"/>
+              <a:lnSpc>
+                <a:spcPts val="2200"/>
+              </a:lnSpc>
+            </a:pPr>
+            <a:r>
+              <a:rPr sz="2000" b="0">
+                <a:solidFill>
+                  <a:srgbClr val="333333"/>
+                </a:solidFill>
+                <a:latin typeface="Calibri"/>
+              </a:rPr>
+              <a:t>Load the starter placement, run the algorithm once</a:t>
+            </a:r>
+          </a:p>
+          <a:p>
+            <a:pPr lvl="0" marL="457200" indent="-228600">
+              <a:buFont typeface="Calibri"/>
+              <a:spcAft>
+                <a:spcPts val="1000"/>
+              </a:spcAft>
+              <a:buSzPct val="100000"/>
+              <a:buChar char="•"/>
+              <a:lnSpc>
+                <a:spcPts val="2200"/>
+              </a:lnSpc>
+            </a:pPr>
+            <a:r>
+              <a:rPr sz="2000" b="0">
+                <a:solidFill>
+                  <a:srgbClr val="333333"/>
+                </a:solidFill>
+                <a:latin typeface="Calibri"/>
+              </a:rPr>
+              <a:t>Work the challenges that lock the goldens</a:t>
+            </a:r>
+          </a:p>
+        </p:txBody>
+      </p:sp>
+      <p:sp>
+        <p:nvSpPr>
+          <p:cNvPr id="4" name="TextBox 3"/>
+          <p:cNvSpPr txBox="1"/>
+          <p:nvPr/>
+        </p:nvSpPr>
+        <p:spPr>
+          <a:xfrm>
+            <a:off x="548640" y="6355080"/>
+            <a:ext cx="11064240" cy="320040"/>
+          </a:xfrm>
+          <a:prstGeom prst="rect">
+            <a:avLst/>
+          </a:prstGeom>
+          <a:noFill/>
+        </p:spPr>
+        <p:txBody>
+          <a:bodyPr wrap="square">
+            <a:noAutofit/>
+          </a:bodyPr>
+          <a:lstStyle/>
+          <a:p>
+            <a:pPr algn="r">
+              <a:lnSpc>
+                <a:spcPts val="2200"/>
+              </a:lnSpc>
+              <a:defRPr sz="1000" b="0">
+                <a:solidFill>
+                  <a:srgbClr val="666666"/>
+                </a:solidFill>
+                <a:latin typeface="Calibri"/>
+              </a:defRPr>
+            </a:pPr>
+            <a:r>
+              <a:t>learn_placement — 05 analytical place</a:t>
+            </a:r>
+          </a:p>
+        </p:txBody>
+      </p:sp>
+    </p:spTree>
+  </p:cSld>
+  <p:clrMapOvr>
+    <a:masterClrMapping/>
+  </p:clrMapOvr>
+</p:sld>
+</file>
+
+<file path=ppt/slides/slide12.xml><?xml version="1.0" encoding="utf-8"?>
+<p:sld xmlns:a="http://schemas.openxmlformats.org/drawingml/2006/main" xmlns:p="http://schemas.openxmlformats.org/presentationml/2006/main" xmlns:r="http://schemas.openxmlformats.org/officeDocument/2006/relationships">
+  <p:cSld>
+    <p:spTree>
+      <p:nvGrpSpPr>
+        <p:cNvPr id="1" name=""/>
+        <p:cNvGrpSpPr/>
+        <p:nvPr/>
+      </p:nvGrpSpPr>
+      <p:grpSpPr/>
+      <p:sp>
+        <p:nvSpPr>
+          <p:cNvPr id="2" name="TextBox 1"/>
+          <p:cNvSpPr txBox="1"/>
+          <p:nvPr/>
+        </p:nvSpPr>
+        <p:spPr>
+          <a:xfrm>
+            <a:off x="548640" y="411480"/>
+            <a:ext cx="11064240" cy="777240"/>
+          </a:xfrm>
+          <a:prstGeom prst="rect">
+            <a:avLst/>
+          </a:prstGeom>
+          <a:noFill/>
+        </p:spPr>
+        <p:txBody>
+          <a:bodyPr wrap="square">
+            <a:noAutofit/>
+          </a:bodyPr>
+          <a:lstStyle/>
+          <a:p>
+            <a:pPr>
+              <a:lnSpc>
+                <a:spcPts val="2200"/>
+              </a:lnSpc>
+            </a:pPr>
+            <a:r>
+              <a:rPr sz="2800" b="1">
+                <a:solidFill>
+                  <a:srgbClr val="1A1A2E"/>
+                </a:solidFill>
+                <a:latin typeface="Calibri"/>
+              </a:rPr>
+              <a:t>Implement track</a:t>
+            </a:r>
+          </a:p>
+        </p:txBody>
+      </p:sp>
+      <p:sp>
+        <p:nvSpPr>
+          <p:cNvPr id="3" name="TextBox 2"/>
+          <p:cNvSpPr txBox="1"/>
+          <p:nvPr/>
+        </p:nvSpPr>
+        <p:spPr>
+          <a:xfrm>
+            <a:off x="548640" y="1234440"/>
+            <a:ext cx="11064240" cy="4937760"/>
+          </a:xfrm>
+          <a:prstGeom prst="rect">
+            <a:avLst/>
+          </a:prstGeom>
+          <a:noFill/>
+        </p:spPr>
+        <p:txBody>
+          <a:bodyPr wrap="square">
+            <a:noAutofit/>
+          </a:bodyPr>
+          <a:lstStyle/>
+          <a:p>
+            <a:pPr lvl="0" marL="457200" indent="-228600">
+              <a:buFont typeface="Calibri"/>
+              <a:spcAft>
+                <a:spcPts val="1000"/>
+              </a:spcAft>
+              <a:buSzPct val="100000"/>
+              <a:buChar char="•"/>
+              <a:lnSpc>
+                <a:spcPts val="2200"/>
+              </a:lnSpc>
+            </a:pPr>
+            <a:r>
+              <a:rPr sz="2000" b="0">
+                <a:solidFill>
+                  <a:srgbClr val="333333"/>
+                </a:solidFill>
+                <a:latin typeface="Calibri"/>
+              </a:rPr>
+              <a:t>In the implement track</a:t>
+            </a:r>
+          </a:p>
+          <a:p>
+            <a:pPr lvl="0" marL="457200" indent="-228600">
+              <a:buFont typeface="Calibri"/>
+              <a:spcAft>
+                <a:spcPts val="1000"/>
+              </a:spcAft>
+              <a:buSzPct val="100000"/>
+              <a:buChar char="•"/>
+              <a:lnSpc>
+                <a:spcPts val="2200"/>
+              </a:lnSpc>
+            </a:pPr>
+            <a:r>
+              <a:rPr sz="2000" b="0">
+                <a:solidFill>
+                  <a:srgbClr val="333333"/>
+                </a:solidFill>
+                <a:latin typeface="Calibri"/>
+              </a:rPr>
+              <a:t>Parse `tiny_place.json`, run the algorithm with a deterministic seed</a:t>
+            </a:r>
+          </a:p>
+          <a:p>
+            <a:pPr lvl="0" marL="457200" indent="-228600">
+              <a:buFont typeface="Calibri"/>
+              <a:spcAft>
+                <a:spcPts val="1000"/>
+              </a:spcAft>
+              <a:buSzPct val="100000"/>
+              <a:buChar char="•"/>
+              <a:lnSpc>
+                <a:spcPts val="2200"/>
+              </a:lnSpc>
+            </a:pPr>
+            <a:r>
+              <a:rPr sz="2000" b="0">
+                <a:solidFill>
+                  <a:srgbClr val="333333"/>
+                </a:solidFill>
+                <a:latin typeface="Calibri"/>
+              </a:rPr>
+              <a:t>Match the browser goldens before you claim the checklist</a:t>
+            </a:r>
+          </a:p>
+        </p:txBody>
+      </p:sp>
+      <p:sp>
+        <p:nvSpPr>
+          <p:cNvPr id="4" name="TextBox 3"/>
+          <p:cNvSpPr txBox="1"/>
+          <p:nvPr/>
+        </p:nvSpPr>
+        <p:spPr>
+          <a:xfrm>
+            <a:off x="548640" y="6355080"/>
+            <a:ext cx="11064240" cy="320040"/>
+          </a:xfrm>
+          <a:prstGeom prst="rect">
+            <a:avLst/>
+          </a:prstGeom>
+          <a:noFill/>
+        </p:spPr>
+        <p:txBody>
+          <a:bodyPr wrap="square">
+            <a:noAutofit/>
+          </a:bodyPr>
+          <a:lstStyle/>
+          <a:p>
+            <a:pPr algn="r">
+              <a:lnSpc>
+                <a:spcPts val="2200"/>
+              </a:lnSpc>
+              <a:defRPr sz="1000" b="0">
+                <a:solidFill>
+                  <a:srgbClr val="666666"/>
+                </a:solidFill>
+                <a:latin typeface="Calibri"/>
+              </a:defRPr>
+            </a:pPr>
+            <a:r>
+              <a:t>learn_placement — 05 analytical place</a:t>
+            </a:r>
+          </a:p>
+        </p:txBody>
+      </p:sp>
+    </p:spTree>
+  </p:cSld>
+  <p:clrMapOvr>
+    <a:masterClrMapping/>
+  </p:clrMapOvr>
+</p:sld>
+</file>
+
+<file path=ppt/slides/slide13.xml><?xml version="1.0" encoding="utf-8"?>
+<p:sld xmlns:a="http://schemas.openxmlformats.org/drawingml/2006/main" xmlns:p="http://schemas.openxmlformats.org/presentationml/2006/main" xmlns:r="http://schemas.openxmlformats.org/officeDocument/2006/relationships">
+  <p:cSld>
+    <p:spTree>
+      <p:nvGrpSpPr>
+        <p:cNvPr id="1" name=""/>
+        <p:cNvGrpSpPr/>
+        <p:nvPr/>
+      </p:nvGrpSpPr>
+      <p:grpSpPr/>
+      <p:sp>
+        <p:nvSpPr>
+          <p:cNvPr id="2" name="TextBox 1"/>
+          <p:cNvSpPr txBox="1"/>
+          <p:nvPr/>
+        </p:nvSpPr>
+        <p:spPr>
+          <a:xfrm>
+            <a:off x="548640" y="411480"/>
+            <a:ext cx="11064240" cy="777240"/>
+          </a:xfrm>
+          <a:prstGeom prst="rect">
+            <a:avLst/>
+          </a:prstGeom>
+          <a:noFill/>
+        </p:spPr>
+        <p:txBody>
+          <a:bodyPr wrap="square">
+            <a:noAutofit/>
+          </a:bodyPr>
+          <a:lstStyle/>
+          <a:p>
+            <a:pPr>
+              <a:lnSpc>
+                <a:spcPts val="2200"/>
+              </a:lnSpc>
+            </a:pPr>
+            <a:r>
+              <a:rPr sz="2800" b="1">
+                <a:solidFill>
+                  <a:srgbClr val="1A1A2E"/>
+                </a:solidFill>
+                <a:latin typeface="Calibri"/>
+              </a:rPr>
+              <a:t>Pitfalls</a:t>
+            </a:r>
+          </a:p>
+        </p:txBody>
+      </p:sp>
+      <p:sp>
+        <p:nvSpPr>
+          <p:cNvPr id="3" name="TextBox 2"/>
+          <p:cNvSpPr txBox="1"/>
+          <p:nvPr/>
+        </p:nvSpPr>
+        <p:spPr>
+          <a:xfrm>
+            <a:off x="548640" y="1234440"/>
+            <a:ext cx="11064240" cy="4937760"/>
+          </a:xfrm>
+          <a:prstGeom prst="rect">
+            <a:avLst/>
+          </a:prstGeom>
+          <a:noFill/>
+        </p:spPr>
+        <p:txBody>
+          <a:bodyPr wrap="square">
+            <a:noAutofit/>
+          </a:bodyPr>
+          <a:lstStyle/>
+          <a:p>
+            <a:pPr lvl="0" marL="457200" indent="-228600">
+              <a:buFont typeface="Calibri"/>
+              <a:spcAft>
+                <a:spcPts val="1000"/>
+              </a:spcAft>
+              <a:buSzPct val="100000"/>
+              <a:buChar char="•"/>
+              <a:lnSpc>
+                <a:spcPts val="2200"/>
+              </a:lnSpc>
+            </a:pPr>
+            <a:r>
+              <a:rPr sz="2000" b="0">
+                <a:solidFill>
+                  <a:srgbClr val="333333"/>
+                </a:solidFill>
+                <a:latin typeface="Calibri"/>
+              </a:rPr>
+              <a:t>Common traps</a:t>
+            </a:r>
+          </a:p>
+        </p:txBody>
+      </p:sp>
+      <p:sp>
+        <p:nvSpPr>
+          <p:cNvPr id="4" name="TextBox 3"/>
+          <p:cNvSpPr txBox="1"/>
+          <p:nvPr/>
+        </p:nvSpPr>
+        <p:spPr>
+          <a:xfrm>
+            <a:off x="548640" y="6355080"/>
+            <a:ext cx="11064240" cy="320040"/>
+          </a:xfrm>
+          <a:prstGeom prst="rect">
+            <a:avLst/>
+          </a:prstGeom>
+          <a:noFill/>
+        </p:spPr>
+        <p:txBody>
+          <a:bodyPr wrap="square">
+            <a:noAutofit/>
+          </a:bodyPr>
+          <a:lstStyle/>
+          <a:p>
+            <a:pPr algn="r">
+              <a:lnSpc>
+                <a:spcPts val="2200"/>
+              </a:lnSpc>
+              <a:defRPr sz="1000" b="0">
+                <a:solidFill>
+                  <a:srgbClr val="666666"/>
+                </a:solidFill>
+                <a:latin typeface="Calibri"/>
+              </a:defRPr>
+            </a:pPr>
+            <a:r>
+              <a:t>learn_placement — 05 analytical place</a:t>
+            </a:r>
+          </a:p>
+        </p:txBody>
+      </p:sp>
+    </p:spTree>
+  </p:cSld>
+  <p:clrMapOvr>
+    <a:masterClrMapping/>
+  </p:clrMapOvr>
+</p:sld>
+</file>
+
+<file path=ppt/slides/slide14.xml><?xml version="1.0" encoding="utf-8"?>
+<p:sld xmlns:a="http://schemas.openxmlformats.org/drawingml/2006/main" xmlns:p="http://schemas.openxmlformats.org/presentationml/2006/main" xmlns:r="http://schemas.openxmlformats.org/officeDocument/2006/relationships">
+  <p:cSld>
+    <p:spTree>
+      <p:nvGrpSpPr>
+        <p:cNvPr id="1" name=""/>
+        <p:cNvGrpSpPr/>
+        <p:nvPr/>
+      </p:nvGrpSpPr>
+      <p:grpSpPr/>
+      <p:sp>
+        <p:nvSpPr>
+          <p:cNvPr id="2" name="TextBox 1"/>
+          <p:cNvSpPr txBox="1"/>
+          <p:nvPr/>
+        </p:nvSpPr>
+        <p:spPr>
+          <a:xfrm>
+            <a:off x="548640" y="411480"/>
+            <a:ext cx="11064240" cy="777240"/>
+          </a:xfrm>
+          <a:prstGeom prst="rect">
+            <a:avLst/>
+          </a:prstGeom>
+          <a:noFill/>
+        </p:spPr>
+        <p:txBody>
+          <a:bodyPr wrap="square">
+            <a:noAutofit/>
+          </a:bodyPr>
+          <a:lstStyle/>
+          <a:p>
+            <a:pPr>
+              <a:lnSpc>
+                <a:spcPts val="2200"/>
+              </a:lnSpc>
+            </a:pPr>
+            <a:r>
+              <a:rPr sz="2800" b="1">
+                <a:solidFill>
+                  <a:srgbClr val="1A1A2E"/>
+                </a:solidFill>
+                <a:latin typeface="Calibri"/>
+              </a:rPr>
               <a:t>Your turn</a:t>
             </a:r>
           </a:p>
@@ -4778,28 +5462,6 @@
               <a:t>Watch both HPWL and overflow</a:t>
             </a:r>
           </a:p>
-          <a:p>
-            <a:pPr lvl="0" marL="457200" indent="-228600">
-              <a:buFont typeface="Calibri"/>
-              <a:spcAft>
-                <a:spcPts val="1000"/>
-              </a:spcAft>
-              <a:buSzPct val="100000"/>
-              <a:buChar char="•"/>
-              <a:lnSpc>
-                <a:spcPts val="2200"/>
-              </a:lnSpc>
-            </a:pPr>
-            <a:r>
-              <a:rPr sz="2000" b="0">
-                <a:solidFill>
-                  <a:srgbClr val="333333"/>
-                </a:solidFill>
-                <a:latin typeface="Calibri"/>
-              </a:rPr>
-              <a:t>&lt;!-- algorithm-walkthrough --&gt;</a:t>
-            </a:r>
-          </a:p>
         </p:txBody>
       </p:sp>
       <p:sp>
@@ -4893,45 +5555,21 @@
                 </a:solidFill>
                 <a:latin typeface="Calibri"/>
               </a:rPr>
-              <a:t>Wirelength stage clusters first</a:t>
-            </a:r>
-          </a:p>
-        </p:txBody>
-      </p:sp>
-      <p:pic>
-        <p:nvPicPr>
-          <p:cNvPr id="3" name="Picture 2" descr="01-wl-stage.png"/>
-          <p:cNvPicPr>
-            <a:picLocks noChangeAspect="1"/>
-          </p:cNvPicPr>
-          <p:nvPr/>
-        </p:nvPicPr>
-        <p:blipFill>
-          <a:blip r:embed="rId2"/>
-          <a:stretch>
-            <a:fillRect/>
-          </a:stretch>
-        </p:blipFill>
-        <p:spPr>
-          <a:xfrm>
-            <a:off x="548640" y="1143000"/>
-            <a:ext cx="9404113" cy="4572000"/>
-          </a:xfrm>
-          <a:prstGeom prst="rect">
-            <a:avLst/>
-          </a:prstGeom>
-        </p:spPr>
-      </p:pic>
-      <p:sp>
-        <p:nvSpPr>
-          <p:cNvPr id="4" name="TextBox 3"/>
+              <a:t>Pseudocode</a:t>
+            </a:r>
+          </a:p>
+        </p:txBody>
+      </p:sp>
+      <p:sp>
+        <p:nvSpPr>
+          <p:cNvPr id="3" name="TextBox 2"/>
           <p:cNvSpPr txBox="1"/>
           <p:nvPr/>
         </p:nvSpPr>
         <p:spPr>
           <a:xfrm>
-            <a:off x="548640" y="5897880"/>
-            <a:ext cx="11064240" cy="411480"/>
+            <a:off x="548640" y="1234440"/>
+            <a:ext cx="11064240" cy="4937760"/>
           </a:xfrm>
           <a:prstGeom prst="rect">
             <a:avLst/>
@@ -4944,26 +5582,76 @@
           </a:bodyPr>
           <a:lstStyle/>
           <a:p>
-            <a:pPr>
+            <a:pPr lvl="0" marL="457200" indent="-228600">
+              <a:buFont typeface="Calibri"/>
+              <a:spcAft>
+                <a:spcPts val="1000"/>
+              </a:spcAft>
+              <a:buSzPct val="100000"/>
+              <a:buChar char="•"/>
               <a:lnSpc>
                 <a:spcPts val="2200"/>
               </a:lnSpc>
             </a:pPr>
             <a:r>
-              <a:rPr sz="1200" b="0">
+              <a:rPr sz="2000" b="0">
                 <a:solidFill>
                   <a:srgbClr val="333333"/>
                 </a:solidFill>
                 <a:latin typeface="Calibri"/>
               </a:rPr>
-              <a:t>Wirelength stage clusters first</a:t>
-            </a:r>
-          </a:p>
-        </p:txBody>
-      </p:sp>
-      <p:sp>
-        <p:nvSpPr>
-          <p:cNvPr id="5" name="TextBox 4"/>
+              <a:t>Analytical lite is three stages in pseudocode</a:t>
+            </a:r>
+          </a:p>
+          <a:p>
+            <a:pPr lvl="0" marL="457200" indent="-228600">
+              <a:buFont typeface="Calibri"/>
+              <a:spcAft>
+                <a:spcPts val="1000"/>
+              </a:spcAft>
+              <a:buSzPct val="100000"/>
+              <a:buChar char="•"/>
+              <a:lnSpc>
+                <a:spcPts val="2200"/>
+              </a:lnSpc>
+            </a:pPr>
+            <a:r>
+              <a:rPr sz="2000" b="0">
+                <a:solidFill>
+                  <a:srgbClr val="333333"/>
+                </a:solidFill>
+                <a:latin typeface="Calibri"/>
+              </a:rPr>
+              <a:t>Open this module's examples file and find the Pseudocode section</a:t>
+            </a:r>
+          </a:p>
+          <a:p>
+            <a:pPr lvl="0" marL="457200" indent="-228600">
+              <a:buFont typeface="Calibri"/>
+              <a:spcAft>
+                <a:spcPts val="1000"/>
+              </a:spcAft>
+              <a:buSzPct val="100000"/>
+              <a:buChar char="•"/>
+              <a:lnSpc>
+                <a:spcPts val="2200"/>
+              </a:lnSpc>
+            </a:pPr>
+            <a:r>
+              <a:rPr sz="2000" b="0">
+                <a:solidFill>
+                  <a:srgbClr val="333333"/>
+                </a:solidFill>
+                <a:latin typeface="Calibri"/>
+              </a:rPr>
+              <a:t>That written sketch is what you implement on the implement track and what the browser</a:t>
+            </a:r>
+          </a:p>
+        </p:txBody>
+      </p:sp>
+      <p:sp>
+        <p:nvSpPr>
+          <p:cNvPr id="4" name="TextBox 3"/>
           <p:cNvSpPr txBox="1"/>
           <p:nvPr/>
         </p:nvSpPr>
@@ -5052,45 +5740,21 @@
                 </a:solidFill>
                 <a:latin typeface="Calibri"/>
               </a:rPr>
-              <a:t>Density stage pushes overloaded bins</a:t>
-            </a:r>
-          </a:p>
-        </p:txBody>
-      </p:sp>
-      <p:pic>
-        <p:nvPicPr>
-          <p:cNvPr id="3" name="Picture 2" descr="02-density-stage.png"/>
-          <p:cNvPicPr>
-            <a:picLocks noChangeAspect="1"/>
-          </p:cNvPicPr>
-          <p:nvPr/>
-        </p:nvPicPr>
-        <p:blipFill>
-          <a:blip r:embed="rId2"/>
-          <a:stretch>
-            <a:fillRect/>
-          </a:stretch>
-        </p:blipFill>
-        <p:spPr>
-          <a:xfrm>
-            <a:off x="548640" y="1143000"/>
-            <a:ext cx="9404113" cy="4572000"/>
-          </a:xfrm>
-          <a:prstGeom prst="rect">
-            <a:avLst/>
-          </a:prstGeom>
-        </p:spPr>
-      </p:pic>
-      <p:sp>
-        <p:nvSpPr>
-          <p:cNvPr id="4" name="TextBox 3"/>
+              <a:t>Algorithm sketch</a:t>
+            </a:r>
+          </a:p>
+        </p:txBody>
+      </p:sp>
+      <p:sp>
+        <p:nvSpPr>
+          <p:cNvPr id="3" name="TextBox 2"/>
           <p:cNvSpPr txBox="1"/>
           <p:nvPr/>
         </p:nvSpPr>
         <p:spPr>
           <a:xfrm>
-            <a:off x="548640" y="5897880"/>
-            <a:ext cx="11064240" cy="411480"/>
+            <a:off x="548640" y="1234440"/>
+            <a:ext cx="11064240" cy="4937760"/>
           </a:xfrm>
           <a:prstGeom prst="rect">
             <a:avLst/>
@@ -5103,26 +5767,54 @@
           </a:bodyPr>
           <a:lstStyle/>
           <a:p>
-            <a:pPr>
+            <a:pPr lvl="0" marL="457200" indent="-228600">
+              <a:buFont typeface="Calibri"/>
+              <a:spcAft>
+                <a:spcPts val="1000"/>
+              </a:spcAft>
+              <a:buSzPct val="100000"/>
+              <a:buChar char="•"/>
               <a:lnSpc>
                 <a:spcPts val="2200"/>
               </a:lnSpc>
             </a:pPr>
             <a:r>
-              <a:rPr sz="1200" b="0">
+              <a:rPr sz="2000" b="0">
                 <a:solidFill>
                   <a:srgbClr val="333333"/>
                 </a:solidFill>
                 <a:latin typeface="Calibri"/>
               </a:rPr>
-              <a:t>Density stage pushes overloaded bins</a:t>
-            </a:r>
-          </a:p>
-        </p:txBody>
-      </p:sp>
-      <p:sp>
-        <p:nvSpPr>
-          <p:cNvPr id="5" name="TextBox 4"/>
+              <a:t>Default teaching run lands near forty-eight point one HPWL</a:t>
+            </a:r>
+          </a:p>
+          <a:p>
+            <a:pPr lvl="0" marL="457200" indent="-228600">
+              <a:buFont typeface="Calibri"/>
+              <a:spcAft>
+                <a:spcPts val="1000"/>
+              </a:spcAft>
+              <a:buSzPct val="100000"/>
+              <a:buChar char="•"/>
+              <a:lnSpc>
+                <a:spcPts val="2200"/>
+              </a:lnSpc>
+            </a:pPr>
+            <a:r>
+              <a:rPr sz="2000" b="0">
+                <a:solidFill>
+                  <a:srgbClr val="333333"/>
+                </a:solidFill>
+                <a:latin typeface="Calibri"/>
+              </a:rPr>
+              <a:t>Winning wirelength while overflowing every bin is not success, report both metrics</a:t>
+            </a:r>
+          </a:p>
+        </p:txBody>
+      </p:sp>
+      <p:sp>
+        <p:nvSpPr>
+          <p:cNvPr id="4" name="TextBox 3"/>
           <p:cNvSpPr txBox="1"/>
           <p:nvPr/>
         </p:nvSpPr>
@@ -5211,50 +5903,28 @@
                 </a:solidFill>
                 <a:latin typeface="Calibri"/>
               </a:rPr>
-              <a:t>After analytical: about forty-eight point one</a:t>
-            </a:r>
-          </a:p>
-        </p:txBody>
-      </p:sp>
-      <p:pic>
-        <p:nvPicPr>
-          <p:cNvPr id="3" name="Picture 2" descr="03-after-anal.png"/>
-          <p:cNvPicPr>
-            <a:picLocks noChangeAspect="1"/>
-          </p:cNvPicPr>
+              <a:t>Algorithm sketch — try these</a:t>
+            </a:r>
+          </a:p>
+        </p:txBody>
+      </p:sp>
+      <p:sp>
+        <p:nvSpPr>
+          <p:cNvPr id="3" name="TextBox 2"/>
+          <p:cNvSpPr txBox="1"/>
           <p:nvPr/>
-        </p:nvPicPr>
-        <p:blipFill>
-          <a:blip r:embed="rId2"/>
-          <a:stretch>
-            <a:fillRect/>
-          </a:stretch>
-        </p:blipFill>
+        </p:nvSpPr>
         <p:spPr>
           <a:xfrm>
             <a:off x="548640" y="1143000"/>
-            <a:ext cx="9404113" cy="4572000"/>
+            <a:ext cx="11064240" cy="5029200"/>
           </a:xfrm>
           <a:prstGeom prst="rect">
             <a:avLst/>
           </a:prstGeom>
-        </p:spPr>
-      </p:pic>
-      <p:sp>
-        <p:nvSpPr>
-          <p:cNvPr id="4" name="TextBox 3"/>
-          <p:cNvSpPr txBox="1"/>
-          <p:nvPr/>
-        </p:nvSpPr>
-        <p:spPr>
-          <a:xfrm>
-            <a:off x="548640" y="5897880"/>
-            <a:ext cx="11064240" cy="411480"/>
-          </a:xfrm>
-          <a:prstGeom prst="rect">
-            <a:avLst/>
-          </a:prstGeom>
-          <a:noFill/>
+          <a:solidFill>
+            <a:srgbClr val="F4F4F4"/>
+          </a:solidFill>
         </p:spPr>
         <p:txBody>
           <a:bodyPr wrap="square">
@@ -5266,22 +5936,139 @@
               <a:lnSpc>
                 <a:spcPts val="2200"/>
               </a:lnSpc>
+              <a:spcAft>
+                <a:spcPts val="400"/>
+              </a:spcAft>
             </a:pPr>
             <a:r>
-              <a:rPr sz="1200" b="0">
+              <a:rPr sz="2000" b="0">
                 <a:solidFill>
                   <a:srgbClr val="333333"/>
                 </a:solidFill>
-                <a:latin typeface="Calibri"/>
+                <a:latin typeface="Consolas"/>
               </a:rPr>
-              <a:t>After analytical: about forty-eight point one</a:t>
-            </a:r>
-          </a:p>
-        </p:txBody>
-      </p:sp>
-      <p:sp>
-        <p:nvSpPr>
-          <p:cNvPr id="5" name="TextBox 4"/>
+              <a:t>INPUT: positions, bins, pads</a:t>
+            </a:r>
+          </a:p>
+          <a:p>
+            <a:pPr>
+              <a:lnSpc>
+                <a:spcPts val="2200"/>
+              </a:lnSpc>
+              <a:spcAft>
+                <a:spcPts val="400"/>
+              </a:spcAft>
+            </a:pPr>
+            <a:r>
+              <a:rPr sz="2000" b="0">
+                <a:solidFill>
+                  <a:srgbClr val="333333"/>
+                </a:solidFill>
+                <a:latin typeface="Consolas"/>
+              </a:rPr>
+              <a:t>OUTPUT: positions, HPWL, overflow</a:t>
+            </a:r>
+          </a:p>
+          <a:p>
+            <a:pPr>
+              <a:lnSpc>
+                <a:spcPts val="2200"/>
+              </a:lnSpc>
+              <a:spcAft>
+                <a:spcPts val="400"/>
+              </a:spcAft>
+            </a:pPr>
+            <a:r>
+              <a:rPr sz="2000" b="0">
+                <a:solidFill>
+                  <a:srgbClr val="333333"/>
+                </a:solidFill>
+                <a:latin typeface="Consolas"/>
+              </a:rPr>
+              <a:t>stage1: wirelength pull (force/quad style)</a:t>
+            </a:r>
+          </a:p>
+          <a:p>
+            <a:pPr>
+              <a:lnSpc>
+                <a:spcPts val="2200"/>
+              </a:lnSpc>
+              <a:spcAft>
+                <a:spcPts val="400"/>
+              </a:spcAft>
+            </a:pPr>
+            <a:r>
+              <a:rPr sz="2000" b="0">
+                <a:solidFill>
+                  <a:srgbClr val="333333"/>
+                </a:solidFill>
+                <a:latin typeface="Consolas"/>
+              </a:rPr>
+              <a:t>stage2: push out of overloaded bins</a:t>
+            </a:r>
+          </a:p>
+          <a:p>
+            <a:pPr>
+              <a:lnSpc>
+                <a:spcPts val="2200"/>
+              </a:lnSpc>
+              <a:spcAft>
+                <a:spcPts val="400"/>
+              </a:spcAft>
+            </a:pPr>
+            <a:r>
+              <a:rPr sz="2000" b="0">
+                <a:solidFill>
+                  <a:srgbClr val="333333"/>
+                </a:solidFill>
+                <a:latin typeface="Consolas"/>
+              </a:rPr>
+              <a:t>stage3: light reconnect for HPWL</a:t>
+            </a:r>
+          </a:p>
+          <a:p>
+            <a:pPr>
+              <a:lnSpc>
+                <a:spcPts val="2200"/>
+              </a:lnSpc>
+              <a:spcAft>
+                <a:spcPts val="400"/>
+              </a:spcAft>
+            </a:pPr>
+            <a:r>
+              <a:rPr sz="2000" b="0">
+                <a:solidFill>
+                  <a:srgbClr val="333333"/>
+                </a:solidFill>
+                <a:latin typeface="Consolas"/>
+              </a:rPr>
+              <a:t>report HPWL and overflow together</a:t>
+            </a:r>
+          </a:p>
+          <a:p>
+            <a:pPr>
+              <a:lnSpc>
+                <a:spcPts val="2200"/>
+              </a:lnSpc>
+              <a:spcAft>
+                <a:spcPts val="400"/>
+              </a:spcAft>
+            </a:pPr>
+            <a:r>
+              <a:rPr sz="2000" b="0">
+                <a:solidFill>
+                  <a:srgbClr val="333333"/>
+                </a:solidFill>
+                <a:latin typeface="Consolas"/>
+              </a:rPr>
+              <a:t>GOLDEN lite ≈48.1 HPWL after defaults</a:t>
+            </a:r>
+          </a:p>
+        </p:txBody>
+      </p:sp>
+      <p:sp>
+        <p:nvSpPr>
+          <p:cNvPr id="4" name="TextBox 3"/>
           <p:cNvSpPr txBox="1"/>
           <p:nvPr/>
         </p:nvSpPr>
@@ -5370,14 +6157,14 @@
                 </a:solidFill>
                 <a:latin typeface="Calibri"/>
               </a:rPr>
-              <a:t>Report HPWL and overflow</a:t>
+              <a:t>Wirelength stage clusters first</a:t>
             </a:r>
           </a:p>
         </p:txBody>
       </p:sp>
       <p:pic>
         <p:nvPicPr>
-          <p:cNvPr id="3" name="Picture 2" descr="04-both-metrics.png"/>
+          <p:cNvPr id="3" name="Picture 2" descr="01-wl-stage.png"/>
           <p:cNvPicPr>
             <a:picLocks noChangeAspect="1"/>
           </p:cNvPicPr>
@@ -5433,7 +6220,7 @@
                 </a:solidFill>
                 <a:latin typeface="Calibri"/>
               </a:rPr>
-              <a:t>Report HPWL and overflow</a:t>
+              <a:t>Wirelength stage clusters first</a:t>
             </a:r>
           </a:p>
         </p:txBody>
@@ -5529,14 +6316,14 @@
                 </a:solidFill>
                 <a:latin typeface="Calibri"/>
               </a:rPr>
-              <a:t>Wirelength then density</a:t>
+              <a:t>Density stage pushes overloaded bins</a:t>
             </a:r>
           </a:p>
         </p:txBody>
       </p:sp>
       <p:pic>
         <p:nvPicPr>
-          <p:cNvPr id="3" name="Picture 2" descr="05-takeaway.png"/>
+          <p:cNvPr id="3" name="Picture 2" descr="02-density-stage.png"/>
           <p:cNvPicPr>
             <a:picLocks noChangeAspect="1"/>
           </p:cNvPicPr>
@@ -5592,7 +6379,7 @@
                 </a:solidFill>
                 <a:latin typeface="Calibri"/>
               </a:rPr>
-              <a:t>Wirelength then density</a:t>
+              <a:t>Density stage pushes overloaded bins</a:t>
             </a:r>
           </a:p>
         </p:txBody>
@@ -5688,21 +6475,45 @@
                 </a:solidFill>
                 <a:latin typeface="Calibri"/>
               </a:rPr>
-              <a:t>Browser lab track</a:t>
-            </a:r>
-          </a:p>
-        </p:txBody>
-      </p:sp>
-      <p:sp>
-        <p:nvSpPr>
-          <p:cNvPr id="3" name="TextBox 2"/>
+              <a:t>After analytical: about forty-eight point one</a:t>
+            </a:r>
+          </a:p>
+        </p:txBody>
+      </p:sp>
+      <p:pic>
+        <p:nvPicPr>
+          <p:cNvPr id="3" name="Picture 2" descr="03-after-anal.png"/>
+          <p:cNvPicPr>
+            <a:picLocks noChangeAspect="1"/>
+          </p:cNvPicPr>
+          <p:nvPr/>
+        </p:nvPicPr>
+        <p:blipFill>
+          <a:blip r:embed="rId2"/>
+          <a:stretch>
+            <a:fillRect/>
+          </a:stretch>
+        </p:blipFill>
+        <p:spPr>
+          <a:xfrm>
+            <a:off x="548640" y="1143000"/>
+            <a:ext cx="9404113" cy="4572000"/>
+          </a:xfrm>
+          <a:prstGeom prst="rect">
+            <a:avLst/>
+          </a:prstGeom>
+        </p:spPr>
+      </p:pic>
+      <p:sp>
+        <p:nvSpPr>
+          <p:cNvPr id="4" name="TextBox 3"/>
           <p:cNvSpPr txBox="1"/>
           <p:nvPr/>
         </p:nvSpPr>
         <p:spPr>
           <a:xfrm>
-            <a:off x="548640" y="1234440"/>
-            <a:ext cx="11064240" cy="4937760"/>
+            <a:off x="548640" y="5897880"/>
+            <a:ext cx="11064240" cy="411480"/>
           </a:xfrm>
           <a:prstGeom prst="rect">
             <a:avLst/>
@@ -5715,94 +6526,26 @@
           </a:bodyPr>
           <a:lstStyle/>
           <a:p>
-            <a:pPr lvl="0" marL="457200" indent="-228600">
-              <a:buFont typeface="Calibri"/>
-              <a:spcAft>
-                <a:spcPts val="1000"/>
-              </a:spcAft>
-              <a:buSzPct val="100000"/>
-              <a:buChar char="•"/>
+            <a:pPr>
               <a:lnSpc>
                 <a:spcPts val="2200"/>
               </a:lnSpc>
             </a:pPr>
             <a:r>
-              <a:rPr sz="2000" b="0">
+              <a:rPr sz="1200" b="0">
                 <a:solidFill>
                   <a:srgbClr val="333333"/>
                 </a:solidFill>
                 <a:latin typeface="Calibri"/>
               </a:rPr>
-              <a:t>In the browser lab track, open the </a:t>
-            </a:r>
-            <a:r>
-              <a:rPr sz="2000" b="1">
-                <a:solidFill>
-                  <a:srgbClr val="333333"/>
-                </a:solidFill>
-                <a:latin typeface="Calibri"/>
-              </a:rPr>
-              <a:t>analytical-place</a:t>
-            </a:r>
-            <a:r>
-              <a:rPr sz="2000" b="0">
-                <a:solidFill>
-                  <a:srgbClr val="333333"/>
-                </a:solidFill>
-                <a:latin typeface="Calibri"/>
-              </a:rPr>
-              <a:t> lab from the tools shelf</a:t>
-            </a:r>
-          </a:p>
-          <a:p>
-            <a:pPr lvl="0" marL="457200" indent="-228600">
-              <a:buFont typeface="Calibri"/>
-              <a:spcAft>
-                <a:spcPts val="1000"/>
-              </a:spcAft>
-              <a:buSzPct val="100000"/>
-              <a:buChar char="•"/>
-              <a:lnSpc>
-                <a:spcPts val="2200"/>
-              </a:lnSpc>
-            </a:pPr>
-            <a:r>
-              <a:rPr sz="2000" b="0">
-                <a:solidFill>
-                  <a:srgbClr val="333333"/>
-                </a:solidFill>
-                <a:latin typeface="Calibri"/>
-              </a:rPr>
-              <a:t>Load the starter placement, run the algorithm once</a:t>
-            </a:r>
-          </a:p>
-          <a:p>
-            <a:pPr lvl="0" marL="457200" indent="-228600">
-              <a:buFont typeface="Calibri"/>
-              <a:spcAft>
-                <a:spcPts val="1000"/>
-              </a:spcAft>
-              <a:buSzPct val="100000"/>
-              <a:buChar char="•"/>
-              <a:lnSpc>
-                <a:spcPts val="2200"/>
-              </a:lnSpc>
-            </a:pPr>
-            <a:r>
-              <a:rPr sz="2000" b="0">
-                <a:solidFill>
-                  <a:srgbClr val="333333"/>
-                </a:solidFill>
-                <a:latin typeface="Calibri"/>
-              </a:rPr>
-              <a:t>Work the challenges that lock the goldens</a:t>
-            </a:r>
-          </a:p>
-        </p:txBody>
-      </p:sp>
-      <p:sp>
-        <p:nvSpPr>
-          <p:cNvPr id="4" name="TextBox 3"/>
+              <a:t>After analytical: about forty-eight point one</a:t>
+            </a:r>
+          </a:p>
+        </p:txBody>
+      </p:sp>
+      <p:sp>
+        <p:nvSpPr>
+          <p:cNvPr id="5" name="TextBox 4"/>
           <p:cNvSpPr txBox="1"/>
           <p:nvPr/>
         </p:nvSpPr>
@@ -5891,21 +6634,45 @@
                 </a:solidFill>
                 <a:latin typeface="Calibri"/>
               </a:rPr>
-              <a:t>Implement track</a:t>
-            </a:r>
-          </a:p>
-        </p:txBody>
-      </p:sp>
-      <p:sp>
-        <p:nvSpPr>
-          <p:cNvPr id="3" name="TextBox 2"/>
+              <a:t>Report HPWL and overflow</a:t>
+            </a:r>
+          </a:p>
+        </p:txBody>
+      </p:sp>
+      <p:pic>
+        <p:nvPicPr>
+          <p:cNvPr id="3" name="Picture 2" descr="04-both-metrics.png"/>
+          <p:cNvPicPr>
+            <a:picLocks noChangeAspect="1"/>
+          </p:cNvPicPr>
+          <p:nvPr/>
+        </p:nvPicPr>
+        <p:blipFill>
+          <a:blip r:embed="rId2"/>
+          <a:stretch>
+            <a:fillRect/>
+          </a:stretch>
+        </p:blipFill>
+        <p:spPr>
+          <a:xfrm>
+            <a:off x="548640" y="1143000"/>
+            <a:ext cx="9404113" cy="4572000"/>
+          </a:xfrm>
+          <a:prstGeom prst="rect">
+            <a:avLst/>
+          </a:prstGeom>
+        </p:spPr>
+      </p:pic>
+      <p:sp>
+        <p:nvSpPr>
+          <p:cNvPr id="4" name="TextBox 3"/>
           <p:cNvSpPr txBox="1"/>
           <p:nvPr/>
         </p:nvSpPr>
         <p:spPr>
           <a:xfrm>
-            <a:off x="548640" y="1234440"/>
-            <a:ext cx="11064240" cy="4937760"/>
+            <a:off x="548640" y="5897880"/>
+            <a:ext cx="11064240" cy="411480"/>
           </a:xfrm>
           <a:prstGeom prst="rect">
             <a:avLst/>
@@ -5918,76 +6685,26 @@
           </a:bodyPr>
           <a:lstStyle/>
           <a:p>
-            <a:pPr lvl="0" marL="457200" indent="-228600">
-              <a:buFont typeface="Calibri"/>
-              <a:spcAft>
-                <a:spcPts val="1000"/>
-              </a:spcAft>
-              <a:buSzPct val="100000"/>
-              <a:buChar char="•"/>
+            <a:pPr>
               <a:lnSpc>
                 <a:spcPts val="2200"/>
               </a:lnSpc>
             </a:pPr>
             <a:r>
-              <a:rPr sz="2000" b="0">
+              <a:rPr sz="1200" b="0">
                 <a:solidFill>
                   <a:srgbClr val="333333"/>
                 </a:solidFill>
                 <a:latin typeface="Calibri"/>
               </a:rPr>
-              <a:t>In the implement track, open this module’s examples and the course `common/` solvers</a:t>
-            </a:r>
-          </a:p>
-          <a:p>
-            <a:pPr lvl="0" marL="457200" indent="-228600">
-              <a:buFont typeface="Calibri"/>
-              <a:spcAft>
-                <a:spcPts val="1000"/>
-              </a:spcAft>
-              <a:buSzPct val="100000"/>
-              <a:buChar char="•"/>
-              <a:lnSpc>
-                <a:spcPts val="2200"/>
-              </a:lnSpc>
-            </a:pPr>
-            <a:r>
-              <a:rPr sz="2000" b="0">
-                <a:solidFill>
-                  <a:srgbClr val="333333"/>
-                </a:solidFill>
-                <a:latin typeface="Calibri"/>
-              </a:rPr>
-              <a:t>Parse `tiny_place.json`, run the algorithm with a deterministic seed</a:t>
-            </a:r>
-          </a:p>
-          <a:p>
-            <a:pPr lvl="0" marL="457200" indent="-228600">
-              <a:buFont typeface="Calibri"/>
-              <a:spcAft>
-                <a:spcPts val="1000"/>
-              </a:spcAft>
-              <a:buSzPct val="100000"/>
-              <a:buChar char="•"/>
-              <a:lnSpc>
-                <a:spcPts val="2200"/>
-              </a:lnSpc>
-            </a:pPr>
-            <a:r>
-              <a:rPr sz="2000" b="0">
-                <a:solidFill>
-                  <a:srgbClr val="333333"/>
-                </a:solidFill>
-                <a:latin typeface="Calibri"/>
-              </a:rPr>
-              <a:t>Match the browser goldens before you claim the checklist</a:t>
-            </a:r>
-          </a:p>
-        </p:txBody>
-      </p:sp>
-      <p:sp>
-        <p:nvSpPr>
-          <p:cNvPr id="4" name="TextBox 3"/>
+              <a:t>Report HPWL and overflow</a:t>
+            </a:r>
+          </a:p>
+        </p:txBody>
+      </p:sp>
+      <p:sp>
+        <p:nvSpPr>
+          <p:cNvPr id="5" name="TextBox 4"/>
           <p:cNvSpPr txBox="1"/>
           <p:nvPr/>
         </p:nvSpPr>
